--- a/Semester 7/Entrepreneurship and Professional Pratice/PEC/second chapter entrepreneurship.pptx
+++ b/Semester 7/Entrepreneurship and Professional Pratice/PEC/second chapter entrepreneurship.pptx
@@ -298,7 +298,7 @@
           <a:p>
             <a:fld id="{F551FE63-258A-4B6E-80DA-4278437D4A8E}" type="datetimeFigureOut">
               <a:rPr lang="en-CA" smtClean="0"/>
-              <a:t>2025-11-24</a:t>
+              <a:t>2025-11-27</a:t>
             </a:fld>
             <a:endParaRPr lang="en-CA"/>
           </a:p>
@@ -811,7 +811,7 @@
           <a:p>
             <a:fld id="{A6A8B266-FFB7-498E-B6AF-02B6749BA6FC}" type="datetimeFigureOut">
               <a:rPr lang="en-CA" smtClean="0"/>
-              <a:t>2025-11-24</a:t>
+              <a:t>2025-11-27</a:t>
             </a:fld>
             <a:endParaRPr lang="en-CA"/>
           </a:p>
@@ -1011,7 +1011,7 @@
           <a:p>
             <a:fld id="{A6A8B266-FFB7-498E-B6AF-02B6749BA6FC}" type="datetimeFigureOut">
               <a:rPr lang="en-CA" smtClean="0"/>
-              <a:t>2025-11-24</a:t>
+              <a:t>2025-11-27</a:t>
             </a:fld>
             <a:endParaRPr lang="en-CA"/>
           </a:p>
@@ -1221,7 +1221,7 @@
           <a:p>
             <a:fld id="{A6A8B266-FFB7-498E-B6AF-02B6749BA6FC}" type="datetimeFigureOut">
               <a:rPr lang="en-CA" smtClean="0"/>
-              <a:t>2025-11-24</a:t>
+              <a:t>2025-11-27</a:t>
             </a:fld>
             <a:endParaRPr lang="en-CA"/>
           </a:p>
@@ -1421,7 +1421,7 @@
           <a:p>
             <a:fld id="{A6A8B266-FFB7-498E-B6AF-02B6749BA6FC}" type="datetimeFigureOut">
               <a:rPr lang="en-CA" smtClean="0"/>
-              <a:t>2025-11-24</a:t>
+              <a:t>2025-11-27</a:t>
             </a:fld>
             <a:endParaRPr lang="en-CA"/>
           </a:p>
@@ -1697,7 +1697,7 @@
           <a:p>
             <a:fld id="{A6A8B266-FFB7-498E-B6AF-02B6749BA6FC}" type="datetimeFigureOut">
               <a:rPr lang="en-CA" smtClean="0"/>
-              <a:t>2025-11-24</a:t>
+              <a:t>2025-11-27</a:t>
             </a:fld>
             <a:endParaRPr lang="en-CA"/>
           </a:p>
@@ -1965,7 +1965,7 @@
           <a:p>
             <a:fld id="{A6A8B266-FFB7-498E-B6AF-02B6749BA6FC}" type="datetimeFigureOut">
               <a:rPr lang="en-CA" smtClean="0"/>
-              <a:t>2025-11-24</a:t>
+              <a:t>2025-11-27</a:t>
             </a:fld>
             <a:endParaRPr lang="en-CA"/>
           </a:p>
@@ -2380,7 +2380,7 @@
           <a:p>
             <a:fld id="{A6A8B266-FFB7-498E-B6AF-02B6749BA6FC}" type="datetimeFigureOut">
               <a:rPr lang="en-CA" smtClean="0"/>
-              <a:t>2025-11-24</a:t>
+              <a:t>2025-11-27</a:t>
             </a:fld>
             <a:endParaRPr lang="en-CA"/>
           </a:p>
@@ -2522,7 +2522,7 @@
           <a:p>
             <a:fld id="{A6A8B266-FFB7-498E-B6AF-02B6749BA6FC}" type="datetimeFigureOut">
               <a:rPr lang="en-CA" smtClean="0"/>
-              <a:t>2025-11-24</a:t>
+              <a:t>2025-11-27</a:t>
             </a:fld>
             <a:endParaRPr lang="en-CA"/>
           </a:p>
@@ -2635,7 +2635,7 @@
           <a:p>
             <a:fld id="{A6A8B266-FFB7-498E-B6AF-02B6749BA6FC}" type="datetimeFigureOut">
               <a:rPr lang="en-CA" smtClean="0"/>
-              <a:t>2025-11-24</a:t>
+              <a:t>2025-11-27</a:t>
             </a:fld>
             <a:endParaRPr lang="en-CA"/>
           </a:p>
@@ -2948,7 +2948,7 @@
           <a:p>
             <a:fld id="{A6A8B266-FFB7-498E-B6AF-02B6749BA6FC}" type="datetimeFigureOut">
               <a:rPr lang="en-CA" smtClean="0"/>
-              <a:t>2025-11-24</a:t>
+              <a:t>2025-11-27</a:t>
             </a:fld>
             <a:endParaRPr lang="en-CA"/>
           </a:p>
@@ -3237,7 +3237,7 @@
           <a:p>
             <a:fld id="{A6A8B266-FFB7-498E-B6AF-02B6749BA6FC}" type="datetimeFigureOut">
               <a:rPr lang="en-CA" smtClean="0"/>
-              <a:t>2025-11-24</a:t>
+              <a:t>2025-11-27</a:t>
             </a:fld>
             <a:endParaRPr lang="en-CA"/>
           </a:p>
@@ -3480,7 +3480,7 @@
           <a:p>
             <a:fld id="{A6A8B266-FFB7-498E-B6AF-02B6749BA6FC}" type="datetimeFigureOut">
               <a:rPr lang="en-CA" smtClean="0"/>
-              <a:t>2025-11-24</a:t>
+              <a:t>2025-11-27</a:t>
             </a:fld>
             <a:endParaRPr lang="en-CA"/>
           </a:p>
@@ -4325,18 +4325,72 @@
         </p:spPr>
         <p:txBody>
           <a:bodyPr>
-            <a:normAutofit/>
+            <a:normAutofit lnSpcReduction="10000"/>
           </a:bodyPr>
           <a:lstStyle/>
           <a:p>
-            <a:pPr lvl="0"/>
             <a:r>
               <a:rPr lang="en-CA" b="1" dirty="0"/>
               <a:t>Attribute Analysis:</a:t>
             </a:r>
             <a:r>
               <a:rPr lang="en-CA" dirty="0"/>
-              <a:t> Attribute analysis is the process of breaking down a problem, idea, or thing into  component parts and then thinking about their specific characteristics. It involves listing the incremental innovations in a product or services. It is an important means of adding value to products and services. Attribute analysis involves identification of major attributes (features), generation of alternatives, evaluation of alternatives, and find out a product having new features. For example, Product A + Product B = New Creation. The procedures of attribute analysis involve listing of all obvious attributes of an object or activity. For example, color, shape, size etc. are identifying those attributes that can be altered without destroying the main function of the object.</a:t>
+              <a:t> </a:t>
+            </a:r>
+            <a:r>
+              <a:rPr lang="en-US" b="1" dirty="0"/>
+              <a:t>Attribute analysis</a:t>
+            </a:r>
+            <a:r>
+              <a:rPr lang="en-US" dirty="0"/>
+              <a:t> means breaking a problem, idea, or product into smaller parts and studying each part carefully. It helps us think about how to improve a product or service step-by-step. In this method, we list all the features of a product and look for small changes or new ideas that can add value.</a:t>
+            </a:r>
+          </a:p>
+          <a:p>
+            <a:r>
+              <a:rPr lang="en-US" dirty="0"/>
+              <a:t>The process includes:</a:t>
+            </a:r>
+          </a:p>
+          <a:p>
+            <a:r>
+              <a:rPr lang="en-US" dirty="0"/>
+              <a:t>Identifying the main features of the product.</a:t>
+            </a:r>
+          </a:p>
+          <a:p>
+            <a:r>
+              <a:rPr lang="en-US" dirty="0"/>
+              <a:t>Generating different alternatives for each feature.</a:t>
+            </a:r>
+          </a:p>
+          <a:p>
+            <a:r>
+              <a:rPr lang="en-US" dirty="0"/>
+              <a:t>Evaluating these alternatives.</a:t>
+            </a:r>
+          </a:p>
+          <a:p>
+            <a:r>
+              <a:rPr lang="en-US" dirty="0"/>
+              <a:t>Creating a new or improved product with better features.</a:t>
+            </a:r>
+          </a:p>
+          <a:p>
+            <a:r>
+              <a:rPr lang="en-US" dirty="0"/>
+              <a:t>For example: </a:t>
+            </a:r>
+            <a:r>
+              <a:rPr lang="en-US" b="1" dirty="0"/>
+              <a:t>Product A + Product B = New Creation.</a:t>
+            </a:r>
+            <a:br>
+              <a:rPr lang="en-US" dirty="0"/>
+            </a:br>
+            <a:r>
+              <a:rPr lang="en-US" dirty="0"/>
+              <a:t>We start by listing all the basic features like color, shape, and size. Then we look at which features can be changed without affecting the main function of the product. This helps in developing new or improved products.</a:t>
             </a:r>
           </a:p>
           <a:p>
@@ -4392,8 +4446,8 @@
         </p:nvSpPr>
         <p:spPr>
           <a:xfrm>
-            <a:off x="838200" y="365125"/>
-            <a:ext cx="10515600" cy="494411"/>
+            <a:off x="838200" y="365126"/>
+            <a:ext cx="10515600" cy="315912"/>
           </a:xfrm>
         </p:spPr>
         <p:txBody>
@@ -4424,13 +4478,13 @@
         </p:nvSpPr>
         <p:spPr>
           <a:xfrm>
-            <a:off x="838200" y="1042416"/>
-            <a:ext cx="10515600" cy="5134547"/>
+            <a:off x="838200" y="865240"/>
+            <a:ext cx="10515600" cy="5627634"/>
           </a:xfrm>
         </p:spPr>
         <p:txBody>
           <a:bodyPr>
-            <a:normAutofit fontScale="77500" lnSpcReduction="20000"/>
+            <a:normAutofit fontScale="85000" lnSpcReduction="20000"/>
           </a:bodyPr>
           <a:lstStyle/>
           <a:p>
@@ -4438,94 +4492,43 @@
               <a:rPr lang="en-CA" b="1" dirty="0"/>
               <a:t>Mind map:</a:t>
             </a:r>
-            <a:r>
-              <a:rPr lang="en-CA" dirty="0"/>
-              <a:t> </a:t>
-            </a:r>
-            <a:r>
-              <a:rPr lang="en-US" dirty="0"/>
-              <a:t>A </a:t>
-            </a:r>
-            <a:r>
-              <a:rPr lang="en-US" b="1" dirty="0"/>
-              <a:t>mind map</a:t>
-            </a:r>
-            <a:r>
-              <a:rPr lang="en-US" dirty="0"/>
-              <a:t> is a visual tool used to organize information, ideas, or concepts in a clear and connected way. It helps you think, remember, and understand topics better by showing how ideas relate to each other.</a:t>
-            </a:r>
-          </a:p>
-          <a:p>
-            <a:pPr marL="0" indent="0">
-              <a:buNone/>
-            </a:pPr>
+            <a:br>
+              <a:rPr lang="en-US" dirty="0"/>
+            </a:br>
+            <a:r>
+              <a:rPr lang="en-US" dirty="0"/>
+              <a:t>A mind map is a picture that helps you organize information and ideas in a clear and connected way. It makes thinking, learning, and remembering easier by showing how different ideas link to each other.</a:t>
+            </a:r>
+          </a:p>
+          <a:p>
             <a:r>
               <a:rPr lang="en-US" b="1" dirty="0"/>
               <a:t>What a mind map looks like:</a:t>
             </a:r>
-          </a:p>
-          <a:p>
-            <a:r>
-              <a:rPr lang="en-US" dirty="0"/>
-              <a:t>Start with a </a:t>
-            </a:r>
-            <a:r>
-              <a:rPr lang="en-US" b="1" dirty="0"/>
-              <a:t>main idea</a:t>
-            </a:r>
-            <a:r>
-              <a:rPr lang="en-US" dirty="0"/>
-              <a:t> in the center (e.g., "Environment").</a:t>
-            </a:r>
-          </a:p>
-          <a:p>
-            <a:r>
-              <a:rPr lang="en-US" dirty="0"/>
-              <a:t>From the center, draw </a:t>
-            </a:r>
-            <a:r>
-              <a:rPr lang="en-US" b="1" dirty="0"/>
-              <a:t>branches</a:t>
-            </a:r>
-            <a:r>
-              <a:rPr lang="en-US" dirty="0"/>
-              <a:t> for major subtopics (e.g., Pollution, Conservation, Climate).</a:t>
-            </a:r>
-          </a:p>
-          <a:p>
-            <a:r>
-              <a:rPr lang="en-US" dirty="0"/>
-              <a:t>From each branch, draw </a:t>
-            </a:r>
-            <a:r>
-              <a:rPr lang="en-US" b="1" dirty="0"/>
-              <a:t>smaller branches</a:t>
-            </a:r>
-            <a:r>
-              <a:rPr lang="en-US" dirty="0"/>
-              <a:t> for related ideas (e.g., under Pollution → Air, Water, Noise).</a:t>
-            </a:r>
-          </a:p>
-          <a:p>
-            <a:r>
-              <a:rPr lang="en-US" dirty="0"/>
-              <a:t>It looks like a </a:t>
-            </a:r>
-            <a:r>
-              <a:rPr lang="en-US" b="1" dirty="0"/>
-              <a:t>tree</a:t>
-            </a:r>
-            <a:r>
-              <a:rPr lang="en-US" dirty="0"/>
-              <a:t> or </a:t>
-            </a:r>
-            <a:r>
-              <a:rPr lang="en-US" b="1" dirty="0"/>
-              <a:t>spider diagram</a:t>
-            </a:r>
-            <a:r>
-              <a:rPr lang="en-US" dirty="0"/>
-              <a:t>, where ideas spread outward.</a:t>
+            <a:endParaRPr lang="en-US" dirty="0"/>
+          </a:p>
+          <a:p>
+            <a:r>
+              <a:rPr lang="en-US" dirty="0"/>
+              <a:t>You write the main idea in the center (for example, “Environment”).</a:t>
+            </a:r>
+          </a:p>
+          <a:p>
+            <a:r>
+              <a:rPr lang="en-US" dirty="0"/>
+              <a:t>From the center, you draw lines for the big subtopics (like Pollution, Conservation, Climate).</a:t>
+            </a:r>
+          </a:p>
+          <a:p>
+            <a:r>
+              <a:rPr lang="en-US" dirty="0"/>
+              <a:t>From each subtopic, you draw smaller lines for related ideas (like under Pollution → Air, Water, Noise).</a:t>
+            </a:r>
+          </a:p>
+          <a:p>
+            <a:r>
+              <a:rPr lang="en-US" dirty="0"/>
+              <a:t>It looks like a spider web or a tree with branches spreading outward.</a:t>
             </a:r>
           </a:p>
           <a:p>
@@ -4533,49 +4536,30 @@
               <a:rPr lang="en-US" b="1" dirty="0"/>
               <a:t>Key features of a mind map:</a:t>
             </a:r>
-          </a:p>
-          <a:p>
-            <a:r>
-              <a:rPr lang="en-US" b="1" dirty="0"/>
-              <a:t>Central idea</a:t>
-            </a:r>
-            <a:r>
-              <a:rPr lang="en-US" dirty="0"/>
-              <a:t> in the middle</a:t>
-            </a:r>
-          </a:p>
-          <a:p>
-            <a:r>
-              <a:rPr lang="en-US" b="1" dirty="0"/>
-              <a:t>Branches</a:t>
-            </a:r>
-            <a:r>
-              <a:rPr lang="en-US" dirty="0"/>
-              <a:t> spreading outwards</a:t>
-            </a:r>
-          </a:p>
-          <a:p>
-            <a:r>
-              <a:rPr lang="en-US" b="1" dirty="0"/>
-              <a:t>Keywords, images, colors</a:t>
-            </a:r>
-            <a:r>
-              <a:rPr lang="en-US" dirty="0"/>
-              <a:t> to make it clear and easy to remember</a:t>
-            </a:r>
-          </a:p>
-          <a:p>
-            <a:r>
-              <a:rPr lang="en-US" dirty="0"/>
-              <a:t>Shows </a:t>
-            </a:r>
-            <a:r>
-              <a:rPr lang="en-US" b="1" dirty="0"/>
-              <a:t>connections</a:t>
-            </a:r>
-            <a:r>
-              <a:rPr lang="en-US" dirty="0"/>
-              <a:t> between ideas</a:t>
+            <a:endParaRPr lang="en-US" dirty="0"/>
+          </a:p>
+          <a:p>
+            <a:r>
+              <a:rPr lang="en-US" dirty="0"/>
+              <a:t>Main idea in the middle</a:t>
+            </a:r>
+          </a:p>
+          <a:p>
+            <a:r>
+              <a:rPr lang="en-US" dirty="0"/>
+              <a:t>Branches going outward</a:t>
+            </a:r>
+          </a:p>
+          <a:p>
+            <a:r>
+              <a:rPr lang="en-US" dirty="0"/>
+              <a:t>Uses keywords, pictures, and colors</a:t>
+            </a:r>
+          </a:p>
+          <a:p>
+            <a:r>
+              <a:rPr lang="en-US" dirty="0"/>
+              <a:t>Shows how ideas are connected to each other</a:t>
             </a:r>
           </a:p>
           <a:p>
@@ -23512,7 +23496,7 @@
         </p:spPr>
         <p:txBody>
           <a:bodyPr>
-            <a:normAutofit fontScale="77500" lnSpcReduction="20000"/>
+            <a:normAutofit fontScale="92500" lnSpcReduction="20000"/>
           </a:bodyPr>
           <a:lstStyle/>
           <a:p>
@@ -23523,7 +23507,27 @@
             </a:r>
             <a:r>
               <a:rPr lang="en-CA" dirty="0"/>
-              <a:t>: This method helps to generate ideas in a systematic way. When any problem is identified in organizational activity, a team is formed for suggestion to solve problem. Team members can develop list of issues related with problem. If required they develop questions that are related with the problem by involving elements such as which, why, where, when and who. The systematic searching of answers of these questions helps to find out creative solution of the problem. Finally, team members prepare a report by accumulating all the issues and solutions of a problem for submission to the management. The entrepreneur can use this method for developing entirely new ideas or concentrating on specific area of idea.</a:t>
+              <a:t>: </a:t>
+            </a:r>
+            <a:r>
+              <a:rPr lang="en-US" dirty="0"/>
+              <a:t>When a problem is found in a business, a team is created to think of solutions. The team makes a list of all the issues related to the problem. If needed, they also prepare questions using words like </a:t>
+            </a:r>
+            <a:r>
+              <a:rPr lang="en-US" i="1" dirty="0"/>
+              <a:t>which, why, where, when,</a:t>
+            </a:r>
+            <a:r>
+              <a:rPr lang="en-US" dirty="0"/>
+              <a:t> and </a:t>
+            </a:r>
+            <a:r>
+              <a:rPr lang="en-US" i="1" dirty="0"/>
+              <a:t>who</a:t>
+            </a:r>
+            <a:r>
+              <a:rPr lang="en-US" dirty="0"/>
+              <a:t> to understand the problem better. By answering these questions step-by-step, they can come up with creative solutions. In the end, the team writes a report that includes all the issues and the solutions and submits it to the management. Entrepreneurs can use this method to create new ideas or to focus on improving a specific part of their business.</a:t>
             </a:r>
           </a:p>
           <a:p>
@@ -23534,18 +23538,12 @@
             </a:r>
             <a:r>
               <a:rPr lang="en-CA" dirty="0"/>
-              <a:t>: It is the action of making an association between two unlike things in order to obtain new insights. In this technique, new ideas are developed by looking at </a:t>
-            </a:r>
-            <a:r>
-              <a:rPr lang="en-CA" b="1" dirty="0"/>
-              <a:t>production combinations</a:t>
-            </a:r>
-            <a:r>
-              <a:rPr lang="en-CA" dirty="0"/>
-              <a:t> which are not related to each other. It involves comparing and contrasting a product with something completely different. The combination of contrast or unrelated products and services to each other helps to generate new value to the customers. For example, in order to improve the value of car to the customers, the idea generator may consider placing many objects in the car such as sound system, air condition, safety bag, FM, mobile phone facility, internet and other additional facility.</a:t>
-            </a:r>
-          </a:p>
-          <a:p>
+              <a:t>: </a:t>
+            </a:r>
+            <a:r>
+              <a:rPr lang="en-US" dirty="0"/>
+              <a:t>This method involves connecting two things that are very different from each other to get new ideas. By comparing and combining unrelated products, people can discover new ways to improve value for customers. For example, to make a car more useful, someone might think about adding things like a sound system, air conditioning, airbags, FM radio, mobile phone features, internet, and other facilities. Mixing these unrelated features helps create a better product for customers.</a:t>
+            </a:r>
             <a:endParaRPr lang="en-CA" dirty="0"/>
           </a:p>
         </p:txBody>
